--- a/slides/discussion/04_search_with_uncertainty_discussion.pptx
+++ b/slides/discussion/04_search_with_uncertainty_discussion.pptx
@@ -6134,7 +6134,7 @@
             <a:fld id="{46E2045A-045A-4BC7-A4D3-1395440B1C3D}" type="datetimeFigureOut">
               <a:rPr lang="en-US" smtClean="0"/>
               <a:pPr/>
-              <a:t>10/23/2025</a:t>
+              <a:t>3/5/2026</a:t>
             </a:fld>
             <a:endParaRPr lang="en-US"/>
           </a:p>
@@ -11304,185 +11304,6 @@
   <p:clrMapOvr>
     <a:masterClrMapping/>
   </p:clrMapOvr>
-  <p:timing>
-    <p:tnLst>
-      <p:par>
-        <p:cTn id="1" dur="indefinite" restart="never" nodeType="tmRoot">
-          <p:childTnLst>
-            <p:seq concurrent="1" nextAc="seek">
-              <p:cTn id="2" dur="indefinite" nodeType="mainSeq">
-                <p:childTnLst>
-                  <p:par>
-                    <p:cTn id="3" fill="hold">
-                      <p:stCondLst>
-                        <p:cond delay="indefinite"/>
-                      </p:stCondLst>
-                      <p:childTnLst>
-                        <p:par>
-                          <p:cTn id="4" fill="hold">
-                            <p:stCondLst>
-                              <p:cond delay="0"/>
-                            </p:stCondLst>
-                            <p:childTnLst>
-                              <p:par>
-                                <p:cTn id="5" presetID="1" presetClass="entr" presetSubtype="0" fill="hold" grpId="0" nodeType="clickEffect">
-                                  <p:stCondLst>
-                                    <p:cond delay="0"/>
-                                  </p:stCondLst>
-                                  <p:childTnLst>
-                                    <p:set>
-                                      <p:cBhvr>
-                                        <p:cTn id="6" dur="1" fill="hold">
-                                          <p:stCondLst>
-                                            <p:cond delay="0"/>
-                                          </p:stCondLst>
-                                        </p:cTn>
-                                        <p:tgtEl>
-                                          <p:spTgt spid="3"/>
-                                        </p:tgtEl>
-                                        <p:attrNameLst>
-                                          <p:attrName>style.visibility</p:attrName>
-                                        </p:attrNameLst>
-                                      </p:cBhvr>
-                                      <p:to>
-                                        <p:strVal val="visible"/>
-                                      </p:to>
-                                    </p:set>
-                                  </p:childTnLst>
-                                </p:cTn>
-                              </p:par>
-                              <p:par>
-                                <p:cTn id="7" presetID="1" presetClass="entr" presetSubtype="0" fill="hold" grpId="0" nodeType="withEffect">
-                                  <p:stCondLst>
-                                    <p:cond delay="0"/>
-                                  </p:stCondLst>
-                                  <p:childTnLst>
-                                    <p:set>
-                                      <p:cBhvr>
-                                        <p:cTn id="8" dur="1" fill="hold">
-                                          <p:stCondLst>
-                                            <p:cond delay="0"/>
-                                          </p:stCondLst>
-                                        </p:cTn>
-                                        <p:tgtEl>
-                                          <p:spTgt spid="15"/>
-                                        </p:tgtEl>
-                                        <p:attrNameLst>
-                                          <p:attrName>style.visibility</p:attrName>
-                                        </p:attrNameLst>
-                                      </p:cBhvr>
-                                      <p:to>
-                                        <p:strVal val="visible"/>
-                                      </p:to>
-                                    </p:set>
-                                  </p:childTnLst>
-                                </p:cTn>
-                              </p:par>
-                              <p:par>
-                                <p:cTn id="9" presetID="1" presetClass="entr" presetSubtype="0" fill="hold" grpId="0" nodeType="withEffect">
-                                  <p:stCondLst>
-                                    <p:cond delay="0"/>
-                                  </p:stCondLst>
-                                  <p:childTnLst>
-                                    <p:set>
-                                      <p:cBhvr>
-                                        <p:cTn id="10" dur="1" fill="hold">
-                                          <p:stCondLst>
-                                            <p:cond delay="0"/>
-                                          </p:stCondLst>
-                                        </p:cTn>
-                                        <p:tgtEl>
-                                          <p:spTgt spid="24"/>
-                                        </p:tgtEl>
-                                        <p:attrNameLst>
-                                          <p:attrName>style.visibility</p:attrName>
-                                        </p:attrNameLst>
-                                      </p:cBhvr>
-                                      <p:to>
-                                        <p:strVal val="visible"/>
-                                      </p:to>
-                                    </p:set>
-                                  </p:childTnLst>
-                                </p:cTn>
-                              </p:par>
-                            </p:childTnLst>
-                          </p:cTn>
-                        </p:par>
-                      </p:childTnLst>
-                    </p:cTn>
-                  </p:par>
-                  <p:par>
-                    <p:cTn id="11" fill="hold">
-                      <p:stCondLst>
-                        <p:cond delay="indefinite"/>
-                      </p:stCondLst>
-                      <p:childTnLst>
-                        <p:par>
-                          <p:cTn id="12" fill="hold">
-                            <p:stCondLst>
-                              <p:cond delay="0"/>
-                            </p:stCondLst>
-                            <p:childTnLst>
-                              <p:par>
-                                <p:cTn id="13" presetID="1" presetClass="entr" presetSubtype="0" fill="hold" nodeType="clickEffect">
-                                  <p:stCondLst>
-                                    <p:cond delay="0"/>
-                                  </p:stCondLst>
-                                  <p:childTnLst>
-                                    <p:set>
-                                      <p:cBhvr>
-                                        <p:cTn id="14" dur="1" fill="hold">
-                                          <p:stCondLst>
-                                            <p:cond delay="0"/>
-                                          </p:stCondLst>
-                                        </p:cTn>
-                                        <p:tgtEl>
-                                          <p:spTgt spid="13"/>
-                                        </p:tgtEl>
-                                        <p:attrNameLst>
-                                          <p:attrName>style.visibility</p:attrName>
-                                        </p:attrNameLst>
-                                      </p:cBhvr>
-                                      <p:to>
-                                        <p:strVal val="visible"/>
-                                      </p:to>
-                                    </p:set>
-                                  </p:childTnLst>
-                                </p:cTn>
-                              </p:par>
-                            </p:childTnLst>
-                          </p:cTn>
-                        </p:par>
-                      </p:childTnLst>
-                    </p:cTn>
-                  </p:par>
-                </p:childTnLst>
-              </p:cTn>
-              <p:prevCondLst>
-                <p:cond evt="onPrev" delay="0">
-                  <p:tgtEl>
-                    <p:sldTgt/>
-                  </p:tgtEl>
-                </p:cond>
-              </p:prevCondLst>
-              <p:nextCondLst>
-                <p:cond evt="onNext" delay="0">
-                  <p:tgtEl>
-                    <p:sldTgt/>
-                  </p:tgtEl>
-                </p:cond>
-              </p:nextCondLst>
-            </p:seq>
-          </p:childTnLst>
-        </p:cTn>
-      </p:par>
-    </p:tnLst>
-    <p:bldLst>
-      <p:bldP spid="24" grpId="0" animBg="1"/>
-      <p:bldP spid="3" grpId="0" animBg="1"/>
-      <p:bldP spid="15" grpId="0" animBg="1"/>
-    </p:bldLst>
-  </p:timing>
 </p:sld>
 </file>
 
@@ -13752,340 +13573,6 @@
   <p:clrMapOvr>
     <a:masterClrMapping/>
   </p:clrMapOvr>
-  <p:timing>
-    <p:tnLst>
-      <p:par>
-        <p:cTn id="1" dur="indefinite" restart="never" nodeType="tmRoot">
-          <p:childTnLst>
-            <p:seq concurrent="1" nextAc="seek">
-              <p:cTn id="2" dur="indefinite" nodeType="mainSeq">
-                <p:childTnLst>
-                  <p:par>
-                    <p:cTn id="3" fill="hold">
-                      <p:stCondLst>
-                        <p:cond delay="indefinite"/>
-                      </p:stCondLst>
-                      <p:childTnLst>
-                        <p:par>
-                          <p:cTn id="4" fill="hold">
-                            <p:stCondLst>
-                              <p:cond delay="0"/>
-                            </p:stCondLst>
-                            <p:childTnLst>
-                              <p:par>
-                                <p:cTn id="5" presetID="1" presetClass="entr" presetSubtype="0" fill="hold" grpId="0" nodeType="clickEffect">
-                                  <p:stCondLst>
-                                    <p:cond delay="0"/>
-                                  </p:stCondLst>
-                                  <p:childTnLst>
-                                    <p:set>
-                                      <p:cBhvr>
-                                        <p:cTn id="6" dur="1" fill="hold">
-                                          <p:stCondLst>
-                                            <p:cond delay="0"/>
-                                          </p:stCondLst>
-                                        </p:cTn>
-                                        <p:tgtEl>
-                                          <p:spTgt spid="5">
-                                            <p:txEl>
-                                              <p:pRg st="3" end="3"/>
-                                            </p:txEl>
-                                          </p:spTgt>
-                                        </p:tgtEl>
-                                        <p:attrNameLst>
-                                          <p:attrName>style.visibility</p:attrName>
-                                        </p:attrNameLst>
-                                      </p:cBhvr>
-                                      <p:to>
-                                        <p:strVal val="visible"/>
-                                      </p:to>
-                                    </p:set>
-                                  </p:childTnLst>
-                                </p:cTn>
-                              </p:par>
-                              <p:par>
-                                <p:cTn id="7" presetID="1" presetClass="entr" presetSubtype="0" fill="hold" grpId="0" nodeType="withEffect">
-                                  <p:stCondLst>
-                                    <p:cond delay="0"/>
-                                  </p:stCondLst>
-                                  <p:childTnLst>
-                                    <p:set>
-                                      <p:cBhvr>
-                                        <p:cTn id="8" dur="1" fill="hold">
-                                          <p:stCondLst>
-                                            <p:cond delay="0"/>
-                                          </p:stCondLst>
-                                        </p:cTn>
-                                        <p:tgtEl>
-                                          <p:spTgt spid="5">
-                                            <p:txEl>
-                                              <p:pRg st="4" end="4"/>
-                                            </p:txEl>
-                                          </p:spTgt>
-                                        </p:tgtEl>
-                                        <p:attrNameLst>
-                                          <p:attrName>style.visibility</p:attrName>
-                                        </p:attrNameLst>
-                                      </p:cBhvr>
-                                      <p:to>
-                                        <p:strVal val="visible"/>
-                                      </p:to>
-                                    </p:set>
-                                  </p:childTnLst>
-                                </p:cTn>
-                              </p:par>
-                            </p:childTnLst>
-                          </p:cTn>
-                        </p:par>
-                      </p:childTnLst>
-                    </p:cTn>
-                  </p:par>
-                  <p:par>
-                    <p:cTn id="9" fill="hold">
-                      <p:stCondLst>
-                        <p:cond delay="indefinite"/>
-                      </p:stCondLst>
-                      <p:childTnLst>
-                        <p:par>
-                          <p:cTn id="10" fill="hold">
-                            <p:stCondLst>
-                              <p:cond delay="0"/>
-                            </p:stCondLst>
-                            <p:childTnLst>
-                              <p:par>
-                                <p:cTn id="11" presetID="1" presetClass="entr" presetSubtype="0" fill="hold" grpId="0" nodeType="clickEffect">
-                                  <p:stCondLst>
-                                    <p:cond delay="0"/>
-                                  </p:stCondLst>
-                                  <p:childTnLst>
-                                    <p:set>
-                                      <p:cBhvr>
-                                        <p:cTn id="12" dur="1" fill="hold">
-                                          <p:stCondLst>
-                                            <p:cond delay="0"/>
-                                          </p:stCondLst>
-                                        </p:cTn>
-                                        <p:tgtEl>
-                                          <p:spTgt spid="9"/>
-                                        </p:tgtEl>
-                                        <p:attrNameLst>
-                                          <p:attrName>style.visibility</p:attrName>
-                                        </p:attrNameLst>
-                                      </p:cBhvr>
-                                      <p:to>
-                                        <p:strVal val="visible"/>
-                                      </p:to>
-                                    </p:set>
-                                  </p:childTnLst>
-                                </p:cTn>
-                              </p:par>
-                            </p:childTnLst>
-                          </p:cTn>
-                        </p:par>
-                      </p:childTnLst>
-                    </p:cTn>
-                  </p:par>
-                  <p:par>
-                    <p:cTn id="13" fill="hold">
-                      <p:stCondLst>
-                        <p:cond delay="indefinite"/>
-                      </p:stCondLst>
-                      <p:childTnLst>
-                        <p:par>
-                          <p:cTn id="14" fill="hold">
-                            <p:stCondLst>
-                              <p:cond delay="0"/>
-                            </p:stCondLst>
-                            <p:childTnLst>
-                              <p:par>
-                                <p:cTn id="15" presetID="1" presetClass="entr" presetSubtype="0" fill="hold" grpId="0" nodeType="clickEffect">
-                                  <p:stCondLst>
-                                    <p:cond delay="0"/>
-                                  </p:stCondLst>
-                                  <p:childTnLst>
-                                    <p:set>
-                                      <p:cBhvr>
-                                        <p:cTn id="16" dur="1" fill="hold">
-                                          <p:stCondLst>
-                                            <p:cond delay="0"/>
-                                          </p:stCondLst>
-                                        </p:cTn>
-                                        <p:tgtEl>
-                                          <p:spTgt spid="5">
-                                            <p:txEl>
-                                              <p:pRg st="7" end="7"/>
-                                            </p:txEl>
-                                          </p:spTgt>
-                                        </p:tgtEl>
-                                        <p:attrNameLst>
-                                          <p:attrName>style.visibility</p:attrName>
-                                        </p:attrNameLst>
-                                      </p:cBhvr>
-                                      <p:to>
-                                        <p:strVal val="visible"/>
-                                      </p:to>
-                                    </p:set>
-                                  </p:childTnLst>
-                                </p:cTn>
-                              </p:par>
-                            </p:childTnLst>
-                          </p:cTn>
-                        </p:par>
-                      </p:childTnLst>
-                    </p:cTn>
-                  </p:par>
-                  <p:par>
-                    <p:cTn id="17" fill="hold">
-                      <p:stCondLst>
-                        <p:cond delay="indefinite"/>
-                      </p:stCondLst>
-                      <p:childTnLst>
-                        <p:par>
-                          <p:cTn id="18" fill="hold">
-                            <p:stCondLst>
-                              <p:cond delay="0"/>
-                            </p:stCondLst>
-                            <p:childTnLst>
-                              <p:par>
-                                <p:cTn id="19" presetID="1" presetClass="entr" presetSubtype="0" fill="hold" grpId="0" nodeType="clickEffect">
-                                  <p:stCondLst>
-                                    <p:cond delay="0"/>
-                                  </p:stCondLst>
-                                  <p:childTnLst>
-                                    <p:set>
-                                      <p:cBhvr>
-                                        <p:cTn id="20" dur="1" fill="hold">
-                                          <p:stCondLst>
-                                            <p:cond delay="0"/>
-                                          </p:stCondLst>
-                                        </p:cTn>
-                                        <p:tgtEl>
-                                          <p:spTgt spid="5">
-                                            <p:txEl>
-                                              <p:pRg st="8" end="8"/>
-                                            </p:txEl>
-                                          </p:spTgt>
-                                        </p:tgtEl>
-                                        <p:attrNameLst>
-                                          <p:attrName>style.visibility</p:attrName>
-                                        </p:attrNameLst>
-                                      </p:cBhvr>
-                                      <p:to>
-                                        <p:strVal val="visible"/>
-                                      </p:to>
-                                    </p:set>
-                                  </p:childTnLst>
-                                </p:cTn>
-                              </p:par>
-                            </p:childTnLst>
-                          </p:cTn>
-                        </p:par>
-                      </p:childTnLst>
-                    </p:cTn>
-                  </p:par>
-                  <p:par>
-                    <p:cTn id="21" fill="hold">
-                      <p:stCondLst>
-                        <p:cond delay="indefinite"/>
-                      </p:stCondLst>
-                      <p:childTnLst>
-                        <p:par>
-                          <p:cTn id="22" fill="hold">
-                            <p:stCondLst>
-                              <p:cond delay="0"/>
-                            </p:stCondLst>
-                            <p:childTnLst>
-                              <p:par>
-                                <p:cTn id="23" presetID="1" presetClass="entr" presetSubtype="0" fill="hold" grpId="0" nodeType="clickEffect">
-                                  <p:stCondLst>
-                                    <p:cond delay="0"/>
-                                  </p:stCondLst>
-                                  <p:childTnLst>
-                                    <p:set>
-                                      <p:cBhvr>
-                                        <p:cTn id="24" dur="1" fill="hold">
-                                          <p:stCondLst>
-                                            <p:cond delay="0"/>
-                                          </p:stCondLst>
-                                        </p:cTn>
-                                        <p:tgtEl>
-                                          <p:spTgt spid="5">
-                                            <p:txEl>
-                                              <p:pRg st="9" end="9"/>
-                                            </p:txEl>
-                                          </p:spTgt>
-                                        </p:tgtEl>
-                                        <p:attrNameLst>
-                                          <p:attrName>style.visibility</p:attrName>
-                                        </p:attrNameLst>
-                                      </p:cBhvr>
-                                      <p:to>
-                                        <p:strVal val="visible"/>
-                                      </p:to>
-                                    </p:set>
-                                  </p:childTnLst>
-                                </p:cTn>
-                              </p:par>
-                              <p:par>
-                                <p:cTn id="25" presetID="1" presetClass="entr" presetSubtype="0" fill="hold" grpId="0" nodeType="withEffect">
-                                  <p:stCondLst>
-                                    <p:cond delay="0"/>
-                                  </p:stCondLst>
-                                  <p:childTnLst>
-                                    <p:set>
-                                      <p:cBhvr>
-                                        <p:cTn id="26" dur="1" fill="hold">
-                                          <p:stCondLst>
-                                            <p:cond delay="0"/>
-                                          </p:stCondLst>
-                                        </p:cTn>
-                                        <p:tgtEl>
-                                          <p:spTgt spid="10"/>
-                                        </p:tgtEl>
-                                        <p:attrNameLst>
-                                          <p:attrName>style.visibility</p:attrName>
-                                        </p:attrNameLst>
-                                      </p:cBhvr>
-                                      <p:to>
-                                        <p:strVal val="visible"/>
-                                      </p:to>
-                                    </p:set>
-                                  </p:childTnLst>
-                                </p:cTn>
-                              </p:par>
-                            </p:childTnLst>
-                          </p:cTn>
-                        </p:par>
-                      </p:childTnLst>
-                    </p:cTn>
-                  </p:par>
-                </p:childTnLst>
-              </p:cTn>
-              <p:prevCondLst>
-                <p:cond evt="onPrev" delay="0">
-                  <p:tgtEl>
-                    <p:sldTgt/>
-                  </p:tgtEl>
-                </p:cond>
-              </p:prevCondLst>
-              <p:nextCondLst>
-                <p:cond evt="onNext" delay="0">
-                  <p:tgtEl>
-                    <p:sldTgt/>
-                  </p:tgtEl>
-                </p:cond>
-              </p:nextCondLst>
-            </p:seq>
-          </p:childTnLst>
-        </p:cTn>
-      </p:par>
-    </p:tnLst>
-    <p:bldLst>
-      <p:bldP spid="5" grpId="0" uiExpand="1" build="p"/>
-      <p:bldP spid="10" grpId="0" animBg="1"/>
-      <p:bldP spid="9" grpId="0" animBg="1"/>
-    </p:bldLst>
-  </p:timing>
 </p:sld>
 </file>
 
@@ -20592,7 +20079,15 @@
           <a:p>
             <a:r>
               <a:rPr lang="en-US" dirty="0"/>
-              <a:t>We cannot plan so we must explore by walking around! </a:t>
+              <a:t>We </a:t>
+            </a:r>
+            <a:r>
+              <a:rPr lang="en-US" b="1" dirty="0"/>
+              <a:t>cannot plan </a:t>
+            </a:r>
+            <a:r>
+              <a:rPr lang="en-US" dirty="0"/>
+              <a:t>so we must explore by walking around! </a:t>
             </a:r>
           </a:p>
           <a:p>
@@ -20604,7 +20099,15 @@
           <a:p>
             <a:r>
               <a:rPr lang="en-US" dirty="0"/>
-              <a:t>This is an iterative implementation of DFS without a reached data structure. </a:t>
+              <a:t>This is an iterative implementation of </a:t>
+            </a:r>
+            <a:r>
+              <a:rPr lang="en-US" b="1" dirty="0"/>
+              <a:t>DFS</a:t>
+            </a:r>
+            <a:r>
+              <a:rPr lang="en-US" dirty="0"/>
+              <a:t> without a reached data structure. </a:t>
             </a:r>
             <a:r>
               <a:rPr lang="en-US" dirty="0" err="1"/>
@@ -22879,333 +22382,6 @@
   <p:clrMapOvr>
     <a:masterClrMapping/>
   </p:clrMapOvr>
-  <p:timing>
-    <p:tnLst>
-      <p:par>
-        <p:cTn id="1" dur="indefinite" restart="never" nodeType="tmRoot">
-          <p:childTnLst>
-            <p:seq concurrent="1" nextAc="seek">
-              <p:cTn id="2" dur="indefinite" nodeType="mainSeq">
-                <p:childTnLst>
-                  <p:par>
-                    <p:cTn id="3" fill="hold">
-                      <p:stCondLst>
-                        <p:cond delay="indefinite"/>
-                      </p:stCondLst>
-                      <p:childTnLst>
-                        <p:par>
-                          <p:cTn id="4" fill="hold">
-                            <p:stCondLst>
-                              <p:cond delay="0"/>
-                            </p:stCondLst>
-                            <p:childTnLst>
-                              <p:par>
-                                <p:cTn id="5" presetID="1" presetClass="entr" presetSubtype="0" fill="hold" grpId="0" nodeType="clickEffect">
-                                  <p:stCondLst>
-                                    <p:cond delay="0"/>
-                                  </p:stCondLst>
-                                  <p:childTnLst>
-                                    <p:set>
-                                      <p:cBhvr>
-                                        <p:cTn id="6" dur="1" fill="hold">
-                                          <p:stCondLst>
-                                            <p:cond delay="0"/>
-                                          </p:stCondLst>
-                                        </p:cTn>
-                                        <p:tgtEl>
-                                          <p:spTgt spid="5">
-                                            <p:txEl>
-                                              <p:pRg st="0" end="0"/>
-                                            </p:txEl>
-                                          </p:spTgt>
-                                        </p:tgtEl>
-                                        <p:attrNameLst>
-                                          <p:attrName>style.visibility</p:attrName>
-                                        </p:attrNameLst>
-                                      </p:cBhvr>
-                                      <p:to>
-                                        <p:strVal val="visible"/>
-                                      </p:to>
-                                    </p:set>
-                                  </p:childTnLst>
-                                </p:cTn>
-                              </p:par>
-                            </p:childTnLst>
-                          </p:cTn>
-                        </p:par>
-                      </p:childTnLst>
-                    </p:cTn>
-                  </p:par>
-                  <p:par>
-                    <p:cTn id="7" fill="hold">
-                      <p:stCondLst>
-                        <p:cond delay="indefinite"/>
-                      </p:stCondLst>
-                      <p:childTnLst>
-                        <p:par>
-                          <p:cTn id="8" fill="hold">
-                            <p:stCondLst>
-                              <p:cond delay="0"/>
-                            </p:stCondLst>
-                            <p:childTnLst>
-                              <p:par>
-                                <p:cTn id="9" presetID="1" presetClass="entr" presetSubtype="0" fill="hold" grpId="0" nodeType="clickEffect">
-                                  <p:stCondLst>
-                                    <p:cond delay="0"/>
-                                  </p:stCondLst>
-                                  <p:childTnLst>
-                                    <p:set>
-                                      <p:cBhvr>
-                                        <p:cTn id="10" dur="1" fill="hold">
-                                          <p:stCondLst>
-                                            <p:cond delay="0"/>
-                                          </p:stCondLst>
-                                        </p:cTn>
-                                        <p:tgtEl>
-                                          <p:spTgt spid="5">
-                                            <p:txEl>
-                                              <p:pRg st="1" end="1"/>
-                                            </p:txEl>
-                                          </p:spTgt>
-                                        </p:tgtEl>
-                                        <p:attrNameLst>
-                                          <p:attrName>style.visibility</p:attrName>
-                                        </p:attrNameLst>
-                                      </p:cBhvr>
-                                      <p:to>
-                                        <p:strVal val="visible"/>
-                                      </p:to>
-                                    </p:set>
-                                  </p:childTnLst>
-                                </p:cTn>
-                              </p:par>
-                            </p:childTnLst>
-                          </p:cTn>
-                        </p:par>
-                      </p:childTnLst>
-                    </p:cTn>
-                  </p:par>
-                  <p:par>
-                    <p:cTn id="11" fill="hold">
-                      <p:stCondLst>
-                        <p:cond delay="indefinite"/>
-                      </p:stCondLst>
-                      <p:childTnLst>
-                        <p:par>
-                          <p:cTn id="12" fill="hold">
-                            <p:stCondLst>
-                              <p:cond delay="0"/>
-                            </p:stCondLst>
-                            <p:childTnLst>
-                              <p:par>
-                                <p:cTn id="13" presetID="1" presetClass="entr" presetSubtype="0" fill="hold" grpId="0" nodeType="clickEffect">
-                                  <p:stCondLst>
-                                    <p:cond delay="0"/>
-                                  </p:stCondLst>
-                                  <p:childTnLst>
-                                    <p:set>
-                                      <p:cBhvr>
-                                        <p:cTn id="14" dur="1" fill="hold">
-                                          <p:stCondLst>
-                                            <p:cond delay="0"/>
-                                          </p:stCondLst>
-                                        </p:cTn>
-                                        <p:tgtEl>
-                                          <p:spTgt spid="5">
-                                            <p:txEl>
-                                              <p:pRg st="2" end="2"/>
-                                            </p:txEl>
-                                          </p:spTgt>
-                                        </p:tgtEl>
-                                        <p:attrNameLst>
-                                          <p:attrName>style.visibility</p:attrName>
-                                        </p:attrNameLst>
-                                      </p:cBhvr>
-                                      <p:to>
-                                        <p:strVal val="visible"/>
-                                      </p:to>
-                                    </p:set>
-                                  </p:childTnLst>
-                                </p:cTn>
-                              </p:par>
-                            </p:childTnLst>
-                          </p:cTn>
-                        </p:par>
-                      </p:childTnLst>
-                    </p:cTn>
-                  </p:par>
-                  <p:par>
-                    <p:cTn id="15" fill="hold">
-                      <p:stCondLst>
-                        <p:cond delay="indefinite"/>
-                      </p:stCondLst>
-                      <p:childTnLst>
-                        <p:par>
-                          <p:cTn id="16" fill="hold">
-                            <p:stCondLst>
-                              <p:cond delay="0"/>
-                            </p:stCondLst>
-                            <p:childTnLst>
-                              <p:par>
-                                <p:cTn id="17" presetID="1" presetClass="entr" presetSubtype="0" fill="hold" grpId="0" nodeType="clickEffect">
-                                  <p:stCondLst>
-                                    <p:cond delay="0"/>
-                                  </p:stCondLst>
-                                  <p:childTnLst>
-                                    <p:set>
-                                      <p:cBhvr>
-                                        <p:cTn id="18" dur="1" fill="hold">
-                                          <p:stCondLst>
-                                            <p:cond delay="0"/>
-                                          </p:stCondLst>
-                                        </p:cTn>
-                                        <p:tgtEl>
-                                          <p:spTgt spid="5">
-                                            <p:txEl>
-                                              <p:pRg st="3" end="3"/>
-                                            </p:txEl>
-                                          </p:spTgt>
-                                        </p:tgtEl>
-                                        <p:attrNameLst>
-                                          <p:attrName>style.visibility</p:attrName>
-                                        </p:attrNameLst>
-                                      </p:cBhvr>
-                                      <p:to>
-                                        <p:strVal val="visible"/>
-                                      </p:to>
-                                    </p:set>
-                                  </p:childTnLst>
-                                </p:cTn>
-                              </p:par>
-                            </p:childTnLst>
-                          </p:cTn>
-                        </p:par>
-                      </p:childTnLst>
-                    </p:cTn>
-                  </p:par>
-                  <p:par>
-                    <p:cTn id="19" fill="hold">
-                      <p:stCondLst>
-                        <p:cond delay="indefinite"/>
-                      </p:stCondLst>
-                      <p:childTnLst>
-                        <p:par>
-                          <p:cTn id="20" fill="hold">
-                            <p:stCondLst>
-                              <p:cond delay="0"/>
-                            </p:stCondLst>
-                            <p:childTnLst>
-                              <p:par>
-                                <p:cTn id="21" presetID="1" presetClass="entr" presetSubtype="0" fill="hold" grpId="0" nodeType="clickEffect">
-                                  <p:stCondLst>
-                                    <p:cond delay="0"/>
-                                  </p:stCondLst>
-                                  <p:childTnLst>
-                                    <p:set>
-                                      <p:cBhvr>
-                                        <p:cTn id="22" dur="1" fill="hold">
-                                          <p:stCondLst>
-                                            <p:cond delay="0"/>
-                                          </p:stCondLst>
-                                        </p:cTn>
-                                        <p:tgtEl>
-                                          <p:spTgt spid="5">
-                                            <p:txEl>
-                                              <p:pRg st="4" end="4"/>
-                                            </p:txEl>
-                                          </p:spTgt>
-                                        </p:tgtEl>
-                                        <p:attrNameLst>
-                                          <p:attrName>style.visibility</p:attrName>
-                                        </p:attrNameLst>
-                                      </p:cBhvr>
-                                      <p:to>
-                                        <p:strVal val="visible"/>
-                                      </p:to>
-                                    </p:set>
-                                  </p:childTnLst>
-                                </p:cTn>
-                              </p:par>
-                            </p:childTnLst>
-                          </p:cTn>
-                        </p:par>
-                      </p:childTnLst>
-                    </p:cTn>
-                  </p:par>
-                  <p:par>
-                    <p:cTn id="23" fill="hold">
-                      <p:stCondLst>
-                        <p:cond delay="indefinite"/>
-                      </p:stCondLst>
-                      <p:childTnLst>
-                        <p:par>
-                          <p:cTn id="24" fill="hold">
-                            <p:stCondLst>
-                              <p:cond delay="0"/>
-                            </p:stCondLst>
-                            <p:childTnLst>
-                              <p:par>
-                                <p:cTn id="25" presetID="1" presetClass="entr" presetSubtype="0" fill="hold" grpId="0" nodeType="clickEffect">
-                                  <p:stCondLst>
-                                    <p:cond delay="0"/>
-                                  </p:stCondLst>
-                                  <p:childTnLst>
-                                    <p:set>
-                                      <p:cBhvr>
-                                        <p:cTn id="26" dur="1" fill="hold">
-                                          <p:stCondLst>
-                                            <p:cond delay="0"/>
-                                          </p:stCondLst>
-                                        </p:cTn>
-                                        <p:tgtEl>
-                                          <p:spTgt spid="5">
-                                            <p:txEl>
-                                              <p:pRg st="5" end="5"/>
-                                            </p:txEl>
-                                          </p:spTgt>
-                                        </p:tgtEl>
-                                        <p:attrNameLst>
-                                          <p:attrName>style.visibility</p:attrName>
-                                        </p:attrNameLst>
-                                      </p:cBhvr>
-                                      <p:to>
-                                        <p:strVal val="visible"/>
-                                      </p:to>
-                                    </p:set>
-                                  </p:childTnLst>
-                                </p:cTn>
-                              </p:par>
-                            </p:childTnLst>
-                          </p:cTn>
-                        </p:par>
-                      </p:childTnLst>
-                    </p:cTn>
-                  </p:par>
-                </p:childTnLst>
-              </p:cTn>
-              <p:prevCondLst>
-                <p:cond evt="onPrev" delay="0">
-                  <p:tgtEl>
-                    <p:sldTgt/>
-                  </p:tgtEl>
-                </p:cond>
-              </p:prevCondLst>
-              <p:nextCondLst>
-                <p:cond evt="onNext" delay="0">
-                  <p:tgtEl>
-                    <p:sldTgt/>
-                  </p:tgtEl>
-                </p:cond>
-              </p:nextCondLst>
-            </p:seq>
-          </p:childTnLst>
-        </p:cTn>
-      </p:par>
-    </p:tnLst>
-    <p:bldLst>
-      <p:bldP spid="5" grpId="0" uiExpand="1" build="p"/>
-    </p:bldLst>
-  </p:timing>
 </p:sld>
 </file>
 
@@ -26195,371 +25371,6 @@
   <p:clrMapOvr>
     <a:masterClrMapping/>
   </p:clrMapOvr>
-  <p:timing>
-    <p:tnLst>
-      <p:par>
-        <p:cTn id="1" dur="indefinite" restart="never" nodeType="tmRoot">
-          <p:childTnLst>
-            <p:seq concurrent="1" nextAc="seek">
-              <p:cTn id="2" dur="indefinite" nodeType="mainSeq">
-                <p:childTnLst>
-                  <p:par>
-                    <p:cTn id="3" fill="hold">
-                      <p:stCondLst>
-                        <p:cond delay="indefinite"/>
-                        <p:cond evt="onBegin" delay="0">
-                          <p:tn val="2"/>
-                        </p:cond>
-                      </p:stCondLst>
-                      <p:childTnLst>
-                        <p:par>
-                          <p:cTn id="4" fill="hold">
-                            <p:stCondLst>
-                              <p:cond delay="0"/>
-                            </p:stCondLst>
-                            <p:childTnLst>
-                              <p:par>
-                                <p:cTn id="5" presetID="1" presetClass="entr" presetSubtype="0" fill="hold" grpId="0" nodeType="withEffect">
-                                  <p:stCondLst>
-                                    <p:cond delay="0"/>
-                                  </p:stCondLst>
-                                  <p:childTnLst>
-                                    <p:set>
-                                      <p:cBhvr>
-                                        <p:cTn id="6" dur="1" fill="hold">
-                                          <p:stCondLst>
-                                            <p:cond delay="0"/>
-                                          </p:stCondLst>
-                                        </p:cTn>
-                                        <p:tgtEl>
-                                          <p:spTgt spid="28">
-                                            <p:txEl>
-                                              <p:pRg st="0" end="0"/>
-                                            </p:txEl>
-                                          </p:spTgt>
-                                        </p:tgtEl>
-                                        <p:attrNameLst>
-                                          <p:attrName>style.visibility</p:attrName>
-                                        </p:attrNameLst>
-                                      </p:cBhvr>
-                                      <p:to>
-                                        <p:strVal val="visible"/>
-                                      </p:to>
-                                    </p:set>
-                                  </p:childTnLst>
-                                </p:cTn>
-                              </p:par>
-                            </p:childTnLst>
-                          </p:cTn>
-                        </p:par>
-                      </p:childTnLst>
-                    </p:cTn>
-                  </p:par>
-                  <p:par>
-                    <p:cTn id="7" fill="hold">
-                      <p:stCondLst>
-                        <p:cond delay="indefinite"/>
-                      </p:stCondLst>
-                      <p:childTnLst>
-                        <p:par>
-                          <p:cTn id="8" fill="hold">
-                            <p:stCondLst>
-                              <p:cond delay="0"/>
-                            </p:stCondLst>
-                            <p:childTnLst>
-                              <p:par>
-                                <p:cTn id="9" presetID="1" presetClass="entr" presetSubtype="0" fill="hold" grpId="0" nodeType="clickEffect">
-                                  <p:stCondLst>
-                                    <p:cond delay="0"/>
-                                  </p:stCondLst>
-                                  <p:childTnLst>
-                                    <p:set>
-                                      <p:cBhvr>
-                                        <p:cTn id="10" dur="1" fill="hold">
-                                          <p:stCondLst>
-                                            <p:cond delay="0"/>
-                                          </p:stCondLst>
-                                        </p:cTn>
-                                        <p:tgtEl>
-                                          <p:spTgt spid="28">
-                                            <p:txEl>
-                                              <p:pRg st="2" end="2"/>
-                                            </p:txEl>
-                                          </p:spTgt>
-                                        </p:tgtEl>
-                                        <p:attrNameLst>
-                                          <p:attrName>style.visibility</p:attrName>
-                                        </p:attrNameLst>
-                                      </p:cBhvr>
-                                      <p:to>
-                                        <p:strVal val="visible"/>
-                                      </p:to>
-                                    </p:set>
-                                  </p:childTnLst>
-                                </p:cTn>
-                              </p:par>
-                              <p:par>
-                                <p:cTn id="11" presetID="1" presetClass="entr" presetSubtype="0" fill="hold" grpId="0" nodeType="withEffect">
-                                  <p:stCondLst>
-                                    <p:cond delay="0"/>
-                                  </p:stCondLst>
-                                  <p:childTnLst>
-                                    <p:set>
-                                      <p:cBhvr>
-                                        <p:cTn id="12" dur="1" fill="hold">
-                                          <p:stCondLst>
-                                            <p:cond delay="0"/>
-                                          </p:stCondLst>
-                                        </p:cTn>
-                                        <p:tgtEl>
-                                          <p:spTgt spid="28">
-                                            <p:txEl>
-                                              <p:pRg st="3" end="3"/>
-                                            </p:txEl>
-                                          </p:spTgt>
-                                        </p:tgtEl>
-                                        <p:attrNameLst>
-                                          <p:attrName>style.visibility</p:attrName>
-                                        </p:attrNameLst>
-                                      </p:cBhvr>
-                                      <p:to>
-                                        <p:strVal val="visible"/>
-                                      </p:to>
-                                    </p:set>
-                                  </p:childTnLst>
-                                </p:cTn>
-                              </p:par>
-                              <p:par>
-                                <p:cTn id="13" presetID="1" presetClass="entr" presetSubtype="0" fill="hold" grpId="0" nodeType="withEffect">
-                                  <p:stCondLst>
-                                    <p:cond delay="0"/>
-                                  </p:stCondLst>
-                                  <p:childTnLst>
-                                    <p:set>
-                                      <p:cBhvr>
-                                        <p:cTn id="14" dur="1" fill="hold">
-                                          <p:stCondLst>
-                                            <p:cond delay="0"/>
-                                          </p:stCondLst>
-                                        </p:cTn>
-                                        <p:tgtEl>
-                                          <p:spTgt spid="28">
-                                            <p:txEl>
-                                              <p:pRg st="4" end="4"/>
-                                            </p:txEl>
-                                          </p:spTgt>
-                                        </p:tgtEl>
-                                        <p:attrNameLst>
-                                          <p:attrName>style.visibility</p:attrName>
-                                        </p:attrNameLst>
-                                      </p:cBhvr>
-                                      <p:to>
-                                        <p:strVal val="visible"/>
-                                      </p:to>
-                                    </p:set>
-                                  </p:childTnLst>
-                                </p:cTn>
-                              </p:par>
-                              <p:par>
-                                <p:cTn id="15" presetID="1" presetClass="entr" presetSubtype="0" fill="hold" grpId="0" nodeType="withEffect">
-                                  <p:stCondLst>
-                                    <p:cond delay="0"/>
-                                  </p:stCondLst>
-                                  <p:childTnLst>
-                                    <p:set>
-                                      <p:cBhvr>
-                                        <p:cTn id="16" dur="1" fill="hold">
-                                          <p:stCondLst>
-                                            <p:cond delay="0"/>
-                                          </p:stCondLst>
-                                        </p:cTn>
-                                        <p:tgtEl>
-                                          <p:spTgt spid="28">
-                                            <p:txEl>
-                                              <p:pRg st="5" end="5"/>
-                                            </p:txEl>
-                                          </p:spTgt>
-                                        </p:tgtEl>
-                                        <p:attrNameLst>
-                                          <p:attrName>style.visibility</p:attrName>
-                                        </p:attrNameLst>
-                                      </p:cBhvr>
-                                      <p:to>
-                                        <p:strVal val="visible"/>
-                                      </p:to>
-                                    </p:set>
-                                  </p:childTnLst>
-                                </p:cTn>
-                              </p:par>
-                              <p:par>
-                                <p:cTn id="17" presetID="1" presetClass="entr" presetSubtype="0" fill="hold" grpId="0" nodeType="withEffect">
-                                  <p:stCondLst>
-                                    <p:cond delay="0"/>
-                                  </p:stCondLst>
-                                  <p:childTnLst>
-                                    <p:set>
-                                      <p:cBhvr>
-                                        <p:cTn id="18" dur="1" fill="hold">
-                                          <p:stCondLst>
-                                            <p:cond delay="0"/>
-                                          </p:stCondLst>
-                                        </p:cTn>
-                                        <p:tgtEl>
-                                          <p:spTgt spid="28">
-                                            <p:txEl>
-                                              <p:pRg st="6" end="6"/>
-                                            </p:txEl>
-                                          </p:spTgt>
-                                        </p:tgtEl>
-                                        <p:attrNameLst>
-                                          <p:attrName>style.visibility</p:attrName>
-                                        </p:attrNameLst>
-                                      </p:cBhvr>
-                                      <p:to>
-                                        <p:strVal val="visible"/>
-                                      </p:to>
-                                    </p:set>
-                                  </p:childTnLst>
-                                </p:cTn>
-                              </p:par>
-                              <p:par>
-                                <p:cTn id="19" presetID="1" presetClass="entr" presetSubtype="0" fill="hold" grpId="0" nodeType="withEffect">
-                                  <p:stCondLst>
-                                    <p:cond delay="0"/>
-                                  </p:stCondLst>
-                                  <p:childTnLst>
-                                    <p:set>
-                                      <p:cBhvr>
-                                        <p:cTn id="20" dur="1" fill="hold">
-                                          <p:stCondLst>
-                                            <p:cond delay="0"/>
-                                          </p:stCondLst>
-                                        </p:cTn>
-                                        <p:tgtEl>
-                                          <p:spTgt spid="28">
-                                            <p:txEl>
-                                              <p:pRg st="7" end="7"/>
-                                            </p:txEl>
-                                          </p:spTgt>
-                                        </p:tgtEl>
-                                        <p:attrNameLst>
-                                          <p:attrName>style.visibility</p:attrName>
-                                        </p:attrNameLst>
-                                      </p:cBhvr>
-                                      <p:to>
-                                        <p:strVal val="visible"/>
-                                      </p:to>
-                                    </p:set>
-                                  </p:childTnLst>
-                                </p:cTn>
-                              </p:par>
-                            </p:childTnLst>
-                          </p:cTn>
-                        </p:par>
-                      </p:childTnLst>
-                    </p:cTn>
-                  </p:par>
-                  <p:par>
-                    <p:cTn id="21" fill="hold">
-                      <p:stCondLst>
-                        <p:cond delay="indefinite"/>
-                      </p:stCondLst>
-                      <p:childTnLst>
-                        <p:par>
-                          <p:cTn id="22" fill="hold">
-                            <p:stCondLst>
-                              <p:cond delay="0"/>
-                            </p:stCondLst>
-                            <p:childTnLst>
-                              <p:par>
-                                <p:cTn id="23" presetID="1" presetClass="entr" presetSubtype="0" fill="hold" grpId="0" nodeType="clickEffect">
-                                  <p:stCondLst>
-                                    <p:cond delay="0"/>
-                                  </p:stCondLst>
-                                  <p:childTnLst>
-                                    <p:set>
-                                      <p:cBhvr>
-                                        <p:cTn id="24" dur="1" fill="hold">
-                                          <p:stCondLst>
-                                            <p:cond delay="0"/>
-                                          </p:stCondLst>
-                                        </p:cTn>
-                                        <p:tgtEl>
-                                          <p:spTgt spid="28">
-                                            <p:txEl>
-                                              <p:pRg st="8" end="8"/>
-                                            </p:txEl>
-                                          </p:spTgt>
-                                        </p:tgtEl>
-                                        <p:attrNameLst>
-                                          <p:attrName>style.visibility</p:attrName>
-                                        </p:attrNameLst>
-                                      </p:cBhvr>
-                                      <p:to>
-                                        <p:strVal val="visible"/>
-                                      </p:to>
-                                    </p:set>
-                                  </p:childTnLst>
-                                </p:cTn>
-                              </p:par>
-                              <p:par>
-                                <p:cTn id="25" presetID="1" presetClass="entr" presetSubtype="0" fill="hold" nodeType="withEffect">
-                                  <p:stCondLst>
-                                    <p:cond delay="0"/>
-                                  </p:stCondLst>
-                                  <p:childTnLst>
-                                    <p:set>
-                                      <p:cBhvr>
-                                        <p:cTn id="26" dur="1" fill="hold">
-                                          <p:stCondLst>
-                                            <p:cond delay="0"/>
-                                          </p:stCondLst>
-                                        </p:cTn>
-                                        <p:tgtEl>
-                                          <p:spTgt spid="10"/>
-                                        </p:tgtEl>
-                                        <p:attrNameLst>
-                                          <p:attrName>style.visibility</p:attrName>
-                                        </p:attrNameLst>
-                                      </p:cBhvr>
-                                      <p:to>
-                                        <p:strVal val="visible"/>
-                                      </p:to>
-                                    </p:set>
-                                  </p:childTnLst>
-                                </p:cTn>
-                              </p:par>
-                            </p:childTnLst>
-                          </p:cTn>
-                        </p:par>
-                      </p:childTnLst>
-                    </p:cTn>
-                  </p:par>
-                </p:childTnLst>
-              </p:cTn>
-              <p:prevCondLst>
-                <p:cond evt="onPrev" delay="0">
-                  <p:tgtEl>
-                    <p:sldTgt/>
-                  </p:tgtEl>
-                </p:cond>
-              </p:prevCondLst>
-              <p:nextCondLst>
-                <p:cond evt="onNext" delay="0">
-                  <p:tgtEl>
-                    <p:sldTgt/>
-                  </p:tgtEl>
-                </p:cond>
-              </p:nextCondLst>
-            </p:seq>
-          </p:childTnLst>
-        </p:cTn>
-      </p:par>
-    </p:tnLst>
-    <p:bldLst>
-      <p:bldP spid="28" grpId="0" uiExpand="1" build="p"/>
-    </p:bldLst>
-  </p:timing>
 </p:sld>
 </file>
 
@@ -26596,14 +25407,21 @@
             <p:ph type="title"/>
           </p:nvPr>
         </p:nvSpPr>
-        <p:spPr/>
+        <p:spPr>
+          <a:xfrm>
+            <a:off x="533400" y="538270"/>
+            <a:ext cx="7886700" cy="835540"/>
+          </a:xfrm>
+        </p:spPr>
         <p:txBody>
-          <a:bodyPr/>
+          <a:bodyPr>
+            <a:normAutofit fontScale="90000"/>
+          </a:bodyPr>
           <a:lstStyle/>
           <a:p>
             <a:r>
               <a:rPr lang="en-US" dirty="0"/>
-              <a:t>Example</a:t>
+              <a:t>Example: And-Or Search</a:t>
             </a:r>
           </a:p>
         </p:txBody>
@@ -26624,7 +25442,12 @@
             <p:ph type="body" idx="1"/>
           </p:nvPr>
         </p:nvSpPr>
-        <p:spPr/>
+        <p:spPr>
+          <a:xfrm>
+            <a:off x="628650" y="1366347"/>
+            <a:ext cx="6838950" cy="657498"/>
+          </a:xfrm>
+        </p:spPr>
         <p:txBody>
           <a:bodyPr/>
           <a:lstStyle/>
@@ -26642,6 +25465,388 @@
           </a:p>
         </p:txBody>
       </p:sp>
+      <p:grpSp>
+        <p:nvGrpSpPr>
+          <p:cNvPr id="2" name="Group 1" descr="The AND-OR-Search Algorithm.">
+            <a:extLst>
+              <a:ext uri="{FF2B5EF4-FFF2-40B4-BE49-F238E27FC236}">
+                <a16:creationId xmlns:a16="http://schemas.microsoft.com/office/drawing/2014/main" id="{F0772F23-EB6D-A2E2-F23D-592A28D6E8D3}"/>
+              </a:ext>
+            </a:extLst>
+          </p:cNvPr>
+          <p:cNvGrpSpPr/>
+          <p:nvPr/>
+        </p:nvGrpSpPr>
+        <p:grpSpPr>
+          <a:xfrm>
+            <a:off x="1371600" y="2318524"/>
+            <a:ext cx="7615915" cy="4081461"/>
+            <a:chOff x="304800" y="1142999"/>
+            <a:chExt cx="8682715" cy="4648201"/>
+          </a:xfrm>
+        </p:grpSpPr>
+        <p:pic>
+          <p:nvPicPr>
+            <p:cNvPr id="3" name="Picture 2">
+              <a:extLst>
+                <a:ext uri="{FF2B5EF4-FFF2-40B4-BE49-F238E27FC236}">
+                  <a16:creationId xmlns:a16="http://schemas.microsoft.com/office/drawing/2014/main" id="{288D435D-7DFC-D98B-9576-00E2A8C5D0C9}"/>
+                </a:ext>
+              </a:extLst>
+            </p:cNvPr>
+            <p:cNvPicPr>
+              <a:picLocks noChangeAspect="1"/>
+            </p:cNvPicPr>
+            <p:nvPr/>
+          </p:nvPicPr>
+          <p:blipFill rotWithShape="1">
+            <a:blip r:embed="rId3"/>
+            <a:srcRect b="3689"/>
+            <a:stretch/>
+          </p:blipFill>
+          <p:spPr>
+            <a:xfrm>
+              <a:off x="304800" y="1522328"/>
+              <a:ext cx="8297629" cy="4268872"/>
+            </a:xfrm>
+            <a:prstGeom prst="rect">
+              <a:avLst/>
+            </a:prstGeom>
+          </p:spPr>
+          <p:style>
+            <a:lnRef idx="2">
+              <a:schemeClr val="accent2"/>
+            </a:lnRef>
+            <a:fillRef idx="1">
+              <a:schemeClr val="lt1"/>
+            </a:fillRef>
+            <a:effectRef idx="0">
+              <a:schemeClr val="accent2"/>
+            </a:effectRef>
+            <a:fontRef idx="minor">
+              <a:schemeClr val="dk1"/>
+            </a:fontRef>
+          </p:style>
+        </p:pic>
+        <p:sp>
+          <p:nvSpPr>
+            <p:cNvPr id="6" name="TextBox 5">
+              <a:extLst>
+                <a:ext uri="{FF2B5EF4-FFF2-40B4-BE49-F238E27FC236}">
+                  <a16:creationId xmlns:a16="http://schemas.microsoft.com/office/drawing/2014/main" id="{9EEA487B-81ED-01BE-51AC-6C89A11B2033}"/>
+                </a:ext>
+              </a:extLst>
+            </p:cNvPr>
+            <p:cNvSpPr txBox="1"/>
+            <p:nvPr/>
+          </p:nvSpPr>
+          <p:spPr>
+            <a:xfrm>
+              <a:off x="5291815" y="2798244"/>
+              <a:ext cx="3516079" cy="350514"/>
+            </a:xfrm>
+            <a:prstGeom prst="rect">
+              <a:avLst/>
+            </a:prstGeom>
+            <a:noFill/>
+          </p:spPr>
+          <p:txBody>
+            <a:bodyPr wrap="square" rtlCol="0">
+              <a:spAutoFit/>
+            </a:bodyPr>
+            <a:lstStyle/>
+            <a:p>
+              <a:r>
+                <a:rPr lang="en-US" sz="1400" b="1" dirty="0">
+                  <a:solidFill>
+                    <a:schemeClr val="bg1">
+                      <a:lumMod val="65000"/>
+                    </a:schemeClr>
+                  </a:solidFill>
+                </a:rPr>
+                <a:t>// don’t follow loops using path  </a:t>
+              </a:r>
+            </a:p>
+          </p:txBody>
+        </p:sp>
+        <p:sp>
+          <p:nvSpPr>
+            <p:cNvPr id="7" name="TextBox 6">
+              <a:extLst>
+                <a:ext uri="{FF2B5EF4-FFF2-40B4-BE49-F238E27FC236}">
+                  <a16:creationId xmlns:a16="http://schemas.microsoft.com/office/drawing/2014/main" id="{3F7C3163-D03A-B66E-1EAA-6F3C138EAC2E}"/>
+                </a:ext>
+              </a:extLst>
+            </p:cNvPr>
+            <p:cNvSpPr txBox="1"/>
+            <p:nvPr/>
+          </p:nvSpPr>
+          <p:spPr>
+            <a:xfrm>
+              <a:off x="5291815" y="3101557"/>
+              <a:ext cx="2590800" cy="350514"/>
+            </a:xfrm>
+            <a:prstGeom prst="rect">
+              <a:avLst/>
+            </a:prstGeom>
+            <a:noFill/>
+          </p:spPr>
+          <p:txBody>
+            <a:bodyPr wrap="square" rtlCol="0">
+              <a:spAutoFit/>
+            </a:bodyPr>
+            <a:lstStyle/>
+            <a:p>
+              <a:r>
+                <a:rPr lang="en-US" sz="1400" b="1" dirty="0">
+                  <a:solidFill>
+                    <a:srgbClr val="FF0000"/>
+                  </a:solidFill>
+                </a:rPr>
+                <a:t>// try all possible actions</a:t>
+              </a:r>
+            </a:p>
+          </p:txBody>
+        </p:sp>
+        <p:sp>
+          <p:nvSpPr>
+            <p:cNvPr id="8" name="TextBox 7">
+              <a:extLst>
+                <a:ext uri="{FF2B5EF4-FFF2-40B4-BE49-F238E27FC236}">
+                  <a16:creationId xmlns:a16="http://schemas.microsoft.com/office/drawing/2014/main" id="{880179C3-E307-231B-9D3A-89DEA2086C78}"/>
+                </a:ext>
+              </a:extLst>
+            </p:cNvPr>
+            <p:cNvSpPr txBox="1"/>
+            <p:nvPr/>
+          </p:nvSpPr>
+          <p:spPr>
+            <a:xfrm>
+              <a:off x="4399473" y="4614369"/>
+              <a:ext cx="4287326" cy="841233"/>
+            </a:xfrm>
+            <a:prstGeom prst="rect">
+              <a:avLst/>
+            </a:prstGeom>
+            <a:noFill/>
+          </p:spPr>
+          <p:txBody>
+            <a:bodyPr wrap="square" rtlCol="0">
+              <a:spAutoFit/>
+            </a:bodyPr>
+            <a:lstStyle/>
+            <a:p>
+              <a:r>
+                <a:rPr lang="en-US" sz="1400" b="1" dirty="0">
+                  <a:solidFill>
+                    <a:srgbClr val="FF0000"/>
+                  </a:solidFill>
+                </a:rPr>
+                <a:t>// consider all possible outcomes, none can fail!</a:t>
+              </a:r>
+              <a:br>
+                <a:rPr lang="en-US" sz="1400" b="1" dirty="0">
+                  <a:solidFill>
+                    <a:schemeClr val="bg1">
+                      <a:lumMod val="65000"/>
+                    </a:schemeClr>
+                  </a:solidFill>
+                </a:rPr>
+              </a:br>
+              <a:r>
+                <a:rPr lang="en-US" sz="1400" b="1" dirty="0">
+                  <a:solidFill>
+                    <a:schemeClr val="bg1">
+                      <a:lumMod val="65000"/>
+                    </a:schemeClr>
+                  </a:solidFill>
+                </a:rPr>
+                <a:t> </a:t>
+              </a:r>
+            </a:p>
+            <a:p>
+              <a:r>
+                <a:rPr lang="en-US" sz="1400" b="1" dirty="0">
+                  <a:solidFill>
+                    <a:schemeClr val="bg1">
+                      <a:lumMod val="65000"/>
+                    </a:schemeClr>
+                  </a:solidFill>
+                </a:rPr>
+                <a:t>// fail if we find any non-goal subtree</a:t>
+              </a:r>
+            </a:p>
+          </p:txBody>
+        </p:sp>
+        <p:sp>
+          <p:nvSpPr>
+            <p:cNvPr id="9" name="Callout: Line 8">
+              <a:extLst>
+                <a:ext uri="{FF2B5EF4-FFF2-40B4-BE49-F238E27FC236}">
+                  <a16:creationId xmlns:a16="http://schemas.microsoft.com/office/drawing/2014/main" id="{A723B2FF-0D6A-687A-5E46-2C7D44A79F13}"/>
+                </a:ext>
+              </a:extLst>
+            </p:cNvPr>
+            <p:cNvSpPr/>
+            <p:nvPr/>
+          </p:nvSpPr>
+          <p:spPr>
+            <a:xfrm>
+              <a:off x="5710915" y="1142999"/>
+              <a:ext cx="3276600" cy="333461"/>
+            </a:xfrm>
+            <a:prstGeom prst="borderCallout1">
+              <a:avLst>
+                <a:gd name="adj1" fmla="val 54831"/>
+                <a:gd name="adj2" fmla="val -989"/>
+                <a:gd name="adj3" fmla="val 130541"/>
+                <a:gd name="adj4" fmla="val -9071"/>
+              </a:avLst>
+            </a:prstGeom>
+          </p:spPr>
+          <p:style>
+            <a:lnRef idx="2">
+              <a:schemeClr val="accent1">
+                <a:shade val="50000"/>
+              </a:schemeClr>
+            </a:lnRef>
+            <a:fillRef idx="1">
+              <a:schemeClr val="accent1"/>
+            </a:fillRef>
+            <a:effectRef idx="0">
+              <a:schemeClr val="accent1"/>
+            </a:effectRef>
+            <a:fontRef idx="minor">
+              <a:schemeClr val="lt1"/>
+            </a:fontRef>
+          </p:style>
+          <p:txBody>
+            <a:bodyPr rtlCol="0" anchor="ctr"/>
+            <a:lstStyle/>
+            <a:p>
+              <a:pPr algn="ctr"/>
+              <a:r>
+                <a:rPr lang="en-US" sz="1600" dirty="0"/>
+                <a:t>= nested If-then-else statements</a:t>
+              </a:r>
+            </a:p>
+          </p:txBody>
+        </p:sp>
+        <p:sp>
+          <p:nvSpPr>
+            <p:cNvPr id="10" name="Callout: Line 9">
+              <a:extLst>
+                <a:ext uri="{FF2B5EF4-FFF2-40B4-BE49-F238E27FC236}">
+                  <a16:creationId xmlns:a16="http://schemas.microsoft.com/office/drawing/2014/main" id="{6E27B00E-495A-BA94-8BDD-95242C6E513E}"/>
+                </a:ext>
+              </a:extLst>
+            </p:cNvPr>
+            <p:cNvSpPr/>
+            <p:nvPr/>
+          </p:nvSpPr>
+          <p:spPr>
+            <a:xfrm>
+              <a:off x="5694873" y="2096669"/>
+              <a:ext cx="3276600" cy="195842"/>
+            </a:xfrm>
+            <a:prstGeom prst="borderCallout1">
+              <a:avLst>
+                <a:gd name="adj1" fmla="val 54831"/>
+                <a:gd name="adj2" fmla="val -989"/>
+                <a:gd name="adj3" fmla="val 155504"/>
+                <a:gd name="adj4" fmla="val -48361"/>
+              </a:avLst>
+            </a:prstGeom>
+          </p:spPr>
+          <p:style>
+            <a:lnRef idx="2">
+              <a:schemeClr val="accent1">
+                <a:shade val="50000"/>
+              </a:schemeClr>
+            </a:lnRef>
+            <a:fillRef idx="1">
+              <a:schemeClr val="accent1"/>
+            </a:fillRef>
+            <a:effectRef idx="0">
+              <a:schemeClr val="accent1"/>
+            </a:effectRef>
+            <a:fontRef idx="minor">
+              <a:schemeClr val="lt1"/>
+            </a:fontRef>
+          </p:style>
+          <p:txBody>
+            <a:bodyPr rtlCol="0" anchor="ctr"/>
+            <a:lstStyle/>
+            <a:p>
+              <a:pPr algn="ctr"/>
+              <a:r>
+                <a:rPr lang="en-US" sz="1200" dirty="0"/>
+                <a:t>path is used for cycle checking!</a:t>
+              </a:r>
+            </a:p>
+          </p:txBody>
+        </p:sp>
+        <p:sp>
+          <p:nvSpPr>
+            <p:cNvPr id="11" name="TextBox 10">
+              <a:extLst>
+                <a:ext uri="{FF2B5EF4-FFF2-40B4-BE49-F238E27FC236}">
+                  <a16:creationId xmlns:a16="http://schemas.microsoft.com/office/drawing/2014/main" id="{365C7B78-BAF7-1910-C6C4-337AE24C0278}"/>
+                </a:ext>
+              </a:extLst>
+            </p:cNvPr>
+            <p:cNvSpPr txBox="1"/>
+            <p:nvPr/>
+          </p:nvSpPr>
+          <p:spPr>
+            <a:xfrm>
+              <a:off x="4399473" y="3844186"/>
+              <a:ext cx="4572000" cy="595873"/>
+            </a:xfrm>
+            <a:prstGeom prst="rect">
+              <a:avLst/>
+            </a:prstGeom>
+            <a:noFill/>
+          </p:spPr>
+          <p:txBody>
+            <a:bodyPr wrap="square">
+              <a:spAutoFit/>
+            </a:bodyPr>
+            <a:lstStyle/>
+            <a:p>
+              <a:r>
+                <a:rPr lang="en-US" sz="1400" b="1" dirty="0">
+                  <a:solidFill>
+                    <a:schemeClr val="bg1">
+                      <a:lumMod val="65000"/>
+                    </a:schemeClr>
+                  </a:solidFill>
+                </a:rPr>
+                <a:t>// fail means we found no action that leads to </a:t>
+              </a:r>
+              <a:br>
+                <a:rPr lang="en-US" sz="1400" b="1" dirty="0">
+                  <a:solidFill>
+                    <a:schemeClr val="bg1">
+                      <a:lumMod val="65000"/>
+                    </a:schemeClr>
+                  </a:solidFill>
+                </a:rPr>
+              </a:br>
+              <a:r>
+                <a:rPr lang="en-US" sz="1400" b="1" dirty="0">
+                  <a:solidFill>
+                    <a:schemeClr val="bg1">
+                      <a:lumMod val="65000"/>
+                    </a:schemeClr>
+                  </a:solidFill>
+                </a:rPr>
+                <a:t>// a goal-only subtree</a:t>
+              </a:r>
+            </a:p>
+          </p:txBody>
+        </p:sp>
+      </p:grpSp>
     </p:spTree>
     <p:extLst>
       <p:ext uri="{BB962C8B-B14F-4D97-AF65-F5344CB8AC3E}">
@@ -27227,85 +26432,6 @@
   <p:clrMapOvr>
     <a:masterClrMapping/>
   </p:clrMapOvr>
-  <p:timing>
-    <p:tnLst>
-      <p:par>
-        <p:cTn id="1" dur="indefinite" restart="never" nodeType="tmRoot">
-          <p:childTnLst>
-            <p:seq concurrent="1" nextAc="seek">
-              <p:cTn id="2" dur="indefinite" nodeType="mainSeq">
-                <p:childTnLst>
-                  <p:par>
-                    <p:cTn id="3" fill="hold">
-                      <p:stCondLst>
-                        <p:cond delay="indefinite"/>
-                      </p:stCondLst>
-                      <p:childTnLst>
-                        <p:par>
-                          <p:cTn id="4" fill="hold">
-                            <p:stCondLst>
-                              <p:cond delay="0"/>
-                            </p:stCondLst>
-                            <p:childTnLst>
-                              <p:par>
-                                <p:cTn id="5" presetID="1" presetClass="entr" presetSubtype="0" fill="hold" nodeType="clickEffect">
-                                  <p:stCondLst>
-                                    <p:cond delay="0"/>
-                                  </p:stCondLst>
-                                  <p:childTnLst>
-                                    <p:set>
-                                      <p:cBhvr>
-                                        <p:cTn id="6" dur="1" fill="hold">
-                                          <p:stCondLst>
-                                            <p:cond delay="0"/>
-                                          </p:stCondLst>
-                                        </p:cTn>
-                                        <p:tgtEl>
-                                          <p:spTgt spid="3">
-                                            <p:txEl>
-                                              <p:pRg st="6" end="6"/>
-                                            </p:txEl>
-                                          </p:spTgt>
-                                        </p:tgtEl>
-                                        <p:attrNameLst>
-                                          <p:attrName>style.visibility</p:attrName>
-                                        </p:attrNameLst>
-                                      </p:cBhvr>
-                                      <p:to>
-                                        <p:strVal val="visible"/>
-                                      </p:to>
-                                    </p:set>
-                                  </p:childTnLst>
-                                </p:cTn>
-                              </p:par>
-                            </p:childTnLst>
-                          </p:cTn>
-                        </p:par>
-                      </p:childTnLst>
-                    </p:cTn>
-                  </p:par>
-                </p:childTnLst>
-              </p:cTn>
-              <p:prevCondLst>
-                <p:cond evt="onPrev" delay="0">
-                  <p:tgtEl>
-                    <p:sldTgt/>
-                  </p:tgtEl>
-                </p:cond>
-              </p:prevCondLst>
-              <p:nextCondLst>
-                <p:cond evt="onNext" delay="0">
-                  <p:tgtEl>
-                    <p:sldTgt/>
-                  </p:tgtEl>
-                </p:cond>
-              </p:nextCondLst>
-            </p:seq>
-          </p:childTnLst>
-        </p:cTn>
-      </p:par>
-    </p:tnLst>
-  </p:timing>
 </p:sld>
 </file>
 
